--- a/brand/ignite-search-qbr.pptx
+++ b/brand/ignite-search-qbr.pptx
@@ -113,20 +113,20 @@
   <p:extLst>
     <p:ext uri="{521415D9-36F7-43E2-AB2F-B90AF26B5E84}">
       <p14:sectionLst xmlns:p14="http://schemas.microsoft.com/office/powerpoint/2010/main">
-        <p14:section name="Cover" id="{95324bae-f002-3a9e-a72b-27c2e55746d6}">
+        <p14:section name="Cover" id="{562c4ad4-b34a-0c62-f25c-de92a9623b50}">
           <p14:sldIdLst>
             <p14:sldId id="256"/>
             <p14:sldId id="257"/>
           </p14:sldIdLst>
         </p14:section>
-        <p14:section name="Detail" id="{733e164a-86d0-6e0d-f446-fdda338cd3d6}">
+        <p14:section name="Detail" id="{9583eab5-64d6-10ca-f98f-02efb15a9a51}">
           <p14:sldIdLst>
             <p14:sldId id="258"/>
             <p14:sldId id="259"/>
             <p14:sldId id="260"/>
           </p14:sldIdLst>
         </p14:section>
-        <p14:section name="Ahead" id="{40325e16-f54f-a228-9701-00a00f9c1d64}">
+        <p14:section name="Ahead" id="{5ed647bf-2b12-ede7-c4e8-4c48ddc65a46}">
           <p14:sldIdLst>
             <p14:sldId id="261"/>
             <p14:sldId id="262"/>
@@ -169,7 +169,7 @@
           </c:tx>
           <c:spPr>
             <a:solidFill>
-              <a:srgbClr val="F2D416"/>
+              <a:srgbClr val="F2D216"/>
             </a:solidFill>
             <a:effectLst/>
           </c:spPr>
@@ -1429,7 +1429,7 @@
         <p:spPr>
           <a:xfrm>
             <a:off x="658368" y="548640"/>
-            <a:ext cx="2192731" cy="726948"/>
+            <a:ext cx="2306117" cy="726948"/>
           </a:xfrm>
           <a:prstGeom prst="rect">
             <a:avLst/>
@@ -1568,7 +1568,7 @@
             <a:avLst/>
           </a:prstGeom>
           <a:solidFill>
-            <a:srgbClr val="F2D416"/>
+            <a:srgbClr val="F2D216"/>
           </a:solidFill>
           <a:ln/>
         </p:spPr>
@@ -1631,7 +1631,7 @@
               <a:buNone/>
               <a:defRPr lang="en-US" sz="1300" b="1" spc="400" kern="0" dirty="0">
                 <a:solidFill>
-                  <a:srgbClr val="F2D416"/>
+                  <a:srgbClr val="F2D216"/>
                 </a:solidFill>
               </a:defRPr>
             </a:lvl1pPr>
@@ -1700,7 +1700,7 @@
         <p:spPr>
           <a:xfrm>
             <a:off x="10332720" y="5852160"/>
-            <a:ext cx="1238098" cy="410566"/>
+            <a:ext cx="1302106" cy="410566"/>
           </a:xfrm>
           <a:prstGeom prst="rect">
             <a:avLst/>
@@ -1722,7 +1722,7 @@
             <a:avLst/>
           </a:prstGeom>
           <a:solidFill>
-            <a:srgbClr val="F2D416"/>
+            <a:srgbClr val="F2D216"/>
           </a:solidFill>
           <a:ln/>
         </p:spPr>
@@ -1854,7 +1854,7 @@
         <p:spPr>
           <a:xfrm>
             <a:off x="10716768" y="6053328"/>
-            <a:ext cx="904342" cy="299923"/>
+            <a:ext cx="950976" cy="299923"/>
           </a:xfrm>
           <a:prstGeom prst="rect">
             <a:avLst/>
@@ -1988,7 +1988,7 @@
         <p:spPr>
           <a:xfrm>
             <a:off x="10716768" y="6053328"/>
-            <a:ext cx="904342" cy="299923"/>
+            <a:ext cx="950976" cy="299923"/>
           </a:xfrm>
           <a:prstGeom prst="rect">
             <a:avLst/>
@@ -2092,7 +2092,7 @@
               <a:buNone/>
               <a:defRPr lang="en-US" sz="6000" dirty="0">
                 <a:solidFill>
-                  <a:srgbClr val="F2D416"/>
+                  <a:srgbClr val="F2D216"/>
                 </a:solidFill>
               </a:defRPr>
             </a:lvl1pPr>
@@ -2161,7 +2161,7 @@
         <p:spPr>
           <a:xfrm>
             <a:off x="10332720" y="5760720"/>
-            <a:ext cx="1238098" cy="410566"/>
+            <a:ext cx="1302106" cy="410566"/>
           </a:xfrm>
           <a:prstGeom prst="rect">
             <a:avLst/>
@@ -2183,7 +2183,7 @@
             <a:avLst/>
           </a:prstGeom>
           <a:solidFill>
-            <a:srgbClr val="F2D416"/>
+            <a:srgbClr val="F2D216"/>
           </a:solidFill>
           <a:ln/>
         </p:spPr>
@@ -2699,7 +2699,7 @@
             <a:r>
               <a:rPr lang="en-US" sz="7600" dirty="0">
                 <a:solidFill>
-                  <a:srgbClr val="F2D416"/>
+                  <a:srgbClr val="F2D216"/>
                 </a:solidFill>
                 <a:latin typeface="Bebas Neue" pitchFamily="34" charset="0"/>
                 <a:ea typeface="Bebas Neue" pitchFamily="34" charset="-122"/>
@@ -2774,7 +2774,7 @@
             <a:r>
               <a:rPr lang="en-US" sz="7600" dirty="0">
                 <a:solidFill>
-                  <a:srgbClr val="F2D416"/>
+                  <a:srgbClr val="F2D216"/>
                 </a:solidFill>
                 <a:latin typeface="Bebas Neue" pitchFamily="34" charset="0"/>
                 <a:ea typeface="Bebas Neue" pitchFamily="34" charset="-122"/>
@@ -2849,7 +2849,7 @@
             <a:r>
               <a:rPr lang="en-US" sz="7600" dirty="0">
                 <a:solidFill>
-                  <a:srgbClr val="F2D416"/>
+                  <a:srgbClr val="F2D216"/>
                 </a:solidFill>
                 <a:latin typeface="Bebas Neue" pitchFamily="34" charset="0"/>
                 <a:ea typeface="Bebas Neue" pitchFamily="34" charset="-122"/>
@@ -2924,7 +2924,7 @@
             <a:r>
               <a:rPr lang="en-US" sz="7600" dirty="0">
                 <a:solidFill>
-                  <a:srgbClr val="F2D416"/>
+                  <a:srgbClr val="F2D216"/>
                 </a:solidFill>
                 <a:latin typeface="Bebas Neue" pitchFamily="34" charset="0"/>
                 <a:ea typeface="Bebas Neue" pitchFamily="34" charset="-122"/>
@@ -3119,7 +3119,7 @@
             <a:r>
               <a:rPr lang="en-US" sz="1300" b="1" spc="400" kern="0" dirty="0">
                 <a:solidFill>
-                  <a:srgbClr val="F2D416"/>
+                  <a:srgbClr val="F2D216"/>
                 </a:solidFill>
               </a:rPr>
               <a:t>THE QUARTER</a:t>
@@ -3308,7 +3308,7 @@
             <a:avLst/>
           </a:prstGeom>
           <a:solidFill>
-            <a:srgbClr val="F2D416"/>
+            <a:srgbClr val="F2D216"/>
           </a:solidFill>
           <a:ln/>
         </p:spPr>
@@ -3476,7 +3476,7 @@
             <a:avLst/>
           </a:prstGeom>
           <a:solidFill>
-            <a:srgbClr val="F2D416"/>
+            <a:srgbClr val="F2D216"/>
           </a:solidFill>
           <a:ln/>
         </p:spPr>
@@ -3644,7 +3644,7 @@
             <a:avLst/>
           </a:prstGeom>
           <a:solidFill>
-            <a:srgbClr val="F2D416"/>
+            <a:srgbClr val="F2D216"/>
           </a:solidFill>
           <a:ln/>
         </p:spPr>
@@ -4913,7 +4913,7 @@
             <a:r>
               <a:rPr lang="en-US" sz="6000" dirty="0">
                 <a:solidFill>
-                  <a:srgbClr val="F2D416"/>
+                  <a:srgbClr val="F2D216"/>
                 </a:solidFill>
               </a:rPr>
               <a:t>SAME TIME NEXT QUARTER</a:t>
@@ -4985,7 +4985,7 @@
         <a:srgbClr val="FAF9F6"/>
       </a:lt2>
       <a:accent1>
-        <a:srgbClr val="F2D416"/>
+        <a:srgbClr val="F2D216"/>
       </a:accent1>
       <a:accent2>
         <a:srgbClr val="FFE94F"/>
